--- a/created_docs/Final_Viva_Presentation_COM4901_Theekshana_Gimhan.pptx
+++ b/created_docs/Final_Viva_Presentation_COM4901_Theekshana_Gimhan.pptx
@@ -12327,7 +12327,7 @@
                 <a:ea typeface="Calibri" pitchFamily="34" charset="-122"/>
                 <a:cs typeface="Calibri" pitchFamily="34" charset="-120"/>
               </a:rPr>
-              <a:t>Six measurable objectives, O1 to O6, each with a stated pass criterion</a:t>
+              <a:t>Five objectives, O1 to O5; three carry measurable pass criteria</a:t>
             </a:r>
             <a:endParaRPr lang="en-US" sz="1150" dirty="0"/>
           </a:p>
